--- a/slides/5.Loop/Loop.pptx
+++ b/slides/5.Loop/Loop.pptx
@@ -8050,7 +8050,7 @@
               <a:buNone/>
             </a:pPr>
             <a:r>
-              <a:rPr lang="en-US" dirty="0">
+              <a:rPr lang="en-US" sz="2400" dirty="0">
                 <a:solidFill>
                   <a:schemeClr val="accent2"/>
                 </a:solidFill>
@@ -8058,14 +8058,14 @@
               <a:t>Where we need loops?</a:t>
             </a:r>
             <a:r>
-              <a:rPr lang="en" dirty="0">
+              <a:rPr lang="en" sz="2400" dirty="0">
                 <a:solidFill>
                   <a:schemeClr val="accent2"/>
                 </a:solidFill>
               </a:rPr>
               <a:t>;</a:t>
             </a:r>
-            <a:endParaRPr dirty="0">
+            <a:endParaRPr sz="2400" dirty="0">
               <a:solidFill>
                 <a:schemeClr val="accent2"/>
               </a:solidFill>
@@ -8237,8 +8237,8 @@
         </p:nvSpPr>
         <p:spPr>
           <a:xfrm>
-            <a:off x="1219450" y="535018"/>
-            <a:ext cx="6559877" cy="1894461"/>
+            <a:off x="1232992" y="1189311"/>
+            <a:ext cx="6559877" cy="648097"/>
           </a:xfrm>
           <a:prstGeom prst="rect">
             <a:avLst/>
@@ -8264,7 +8264,7 @@
               <a:buNone/>
             </a:pPr>
             <a:r>
-              <a:rPr lang="en-US" sz="2000" dirty="0">
+              <a:rPr lang="en-US" dirty="0">
                 <a:solidFill>
                   <a:schemeClr val="accent1"/>
                 </a:solidFill>
@@ -8276,7 +8276,7 @@
               <a:t>Where we need </a:t>
             </a:r>
             <a:r>
-              <a:rPr lang="en-US" sz="2000" dirty="0">
+              <a:rPr lang="en-US" dirty="0">
                 <a:solidFill>
                   <a:schemeClr val="accent2"/>
                 </a:solidFill>
@@ -8288,7 +8288,7 @@
               <a:t>repetition</a:t>
             </a:r>
             <a:r>
-              <a:rPr lang="en-US" sz="2000" dirty="0">
+              <a:rPr lang="en-US" dirty="0">
                 <a:solidFill>
                   <a:schemeClr val="accent1"/>
                 </a:solidFill>
@@ -8300,7 +8300,7 @@
               <a:t> or </a:t>
             </a:r>
             <a:r>
-              <a:rPr lang="en-US" sz="2000" dirty="0">
+              <a:rPr lang="en-US" dirty="0">
                 <a:solidFill>
                   <a:schemeClr val="accent2"/>
                 </a:solidFill>
@@ -8312,7 +8312,7 @@
               <a:t>automation</a:t>
             </a:r>
             <a:r>
-              <a:rPr lang="en-US" sz="2000" dirty="0">
+              <a:rPr lang="en-US" dirty="0">
                 <a:solidFill>
                   <a:schemeClr val="accent1"/>
                 </a:solidFill>
@@ -8340,8 +8340,8 @@
         </p:nvSpPr>
         <p:spPr>
           <a:xfrm>
-            <a:off x="1482686" y="2916790"/>
-            <a:ext cx="6951164" cy="944712"/>
+            <a:off x="1232992" y="2302088"/>
+            <a:ext cx="7572824" cy="944712"/>
           </a:xfrm>
           <a:prstGeom prst="rect">
             <a:avLst/>
@@ -8367,7 +8367,7 @@
               <a:buNone/>
             </a:pPr>
             <a:r>
-              <a:rPr lang="en-US" sz="2000" dirty="0">
+              <a:rPr lang="en-US" dirty="0">
                 <a:solidFill>
                   <a:schemeClr val="accent1"/>
                 </a:solidFill>
@@ -8379,7 +8379,7 @@
               <a:t>What are the needed syntaxes for performing repetitions in C? </a:t>
             </a:r>
             <a:r>
-              <a:rPr lang="en-US" sz="2000" dirty="0">
+              <a:rPr lang="en-US" dirty="0">
                 <a:solidFill>
                   <a:schemeClr val="accent2"/>
                 </a:solidFill>
@@ -8407,8 +8407,8 @@
         </p:nvSpPr>
         <p:spPr>
           <a:xfrm>
-            <a:off x="1420342" y="1878323"/>
-            <a:ext cx="6033404" cy="944712"/>
+            <a:off x="1232992" y="1627013"/>
+            <a:ext cx="7511281" cy="944712"/>
           </a:xfrm>
           <a:prstGeom prst="rect">
             <a:avLst/>
@@ -8434,7 +8434,7 @@
               <a:buNone/>
             </a:pPr>
             <a:r>
-              <a:rPr lang="en-US" sz="2000" dirty="0">
+              <a:rPr lang="en-US" dirty="0">
                 <a:solidFill>
                   <a:schemeClr val="accent1"/>
                 </a:solidFill>
@@ -8446,7 +8446,7 @@
               <a:t>In </a:t>
             </a:r>
             <a:r>
-              <a:rPr lang="en-US" sz="2000" dirty="0">
+              <a:rPr lang="en-US" dirty="0">
                 <a:solidFill>
                   <a:schemeClr val="accent2"/>
                 </a:solidFill>
@@ -8458,7 +8458,7 @@
               <a:t>computer science</a:t>
             </a:r>
             <a:r>
-              <a:rPr lang="en-US" sz="2000" dirty="0">
+              <a:rPr lang="en-US" dirty="0">
                 <a:solidFill>
                   <a:schemeClr val="accent1"/>
                 </a:solidFill>
@@ -8470,7 +8470,7 @@
               <a:t>, most of algorithms are full of </a:t>
             </a:r>
             <a:r>
-              <a:rPr lang="en-US" sz="2000" dirty="0">
+              <a:rPr lang="en-US" dirty="0">
                 <a:solidFill>
                   <a:schemeClr val="accent2"/>
                 </a:solidFill>
@@ -8482,7 +8482,7 @@
               <a:t>repetitions</a:t>
             </a:r>
             <a:r>
-              <a:rPr lang="en-US" sz="2000" dirty="0">
+              <a:rPr lang="en-US" dirty="0">
                 <a:solidFill>
                   <a:schemeClr val="accent1"/>
                 </a:solidFill>
@@ -8844,7 +8844,7 @@
         </p:nvSpPr>
         <p:spPr>
           <a:xfrm>
-            <a:off x="1143250" y="582700"/>
+            <a:off x="1049732" y="582700"/>
             <a:ext cx="7290600" cy="541200"/>
           </a:xfrm>
           <a:prstGeom prst="rect">
@@ -8867,14 +8867,14 @@
               <a:buNone/>
             </a:pPr>
             <a:r>
-              <a:rPr lang="en-US" dirty="0">
+              <a:rPr lang="en-US" sz="2400" dirty="0">
                 <a:solidFill>
                   <a:schemeClr val="accent2"/>
                 </a:solidFill>
               </a:rPr>
               <a:t>Checking a condition</a:t>
             </a:r>
-            <a:endParaRPr dirty="0">
+            <a:endParaRPr sz="2400" dirty="0">
               <a:solidFill>
                 <a:schemeClr val="accent2"/>
               </a:solidFill>
@@ -9124,8 +9124,8 @@
         </p:nvSpPr>
         <p:spPr>
           <a:xfrm>
-            <a:off x="1330286" y="1154707"/>
-            <a:ext cx="7103564" cy="944712"/>
+            <a:off x="1178647" y="1159855"/>
+            <a:ext cx="7847366" cy="944712"/>
           </a:xfrm>
           <a:prstGeom prst="rect">
             <a:avLst/>
@@ -9151,7 +9151,7 @@
               <a:buNone/>
             </a:pPr>
             <a:r>
-              <a:rPr lang="en-US" sz="2000" dirty="0">
+              <a:rPr lang="en-US" dirty="0">
                 <a:solidFill>
                   <a:schemeClr val="accent1"/>
                 </a:solidFill>
@@ -9179,8 +9179,8 @@
         </p:nvSpPr>
         <p:spPr>
           <a:xfrm>
-            <a:off x="1236768" y="2130226"/>
-            <a:ext cx="7103564" cy="944712"/>
+            <a:off x="1236767" y="2130226"/>
+            <a:ext cx="7516207" cy="944712"/>
           </a:xfrm>
           <a:prstGeom prst="rect">
             <a:avLst/>
@@ -9206,7 +9206,7 @@
               <a:buNone/>
             </a:pPr>
             <a:r>
-              <a:rPr lang="en-US" sz="2000" dirty="0">
+              <a:rPr lang="en-US" dirty="0">
                 <a:solidFill>
                   <a:schemeClr val="accent1"/>
                 </a:solidFill>
@@ -9218,7 +9218,7 @@
               <a:t>The number is named </a:t>
             </a:r>
             <a:r>
-              <a:rPr lang="en-US" sz="2000" dirty="0">
+              <a:rPr lang="en-US" dirty="0">
                 <a:solidFill>
                   <a:schemeClr val="accent2"/>
                 </a:solidFill>
@@ -9230,7 +9230,7 @@
               <a:t>ugly</a:t>
             </a:r>
             <a:r>
-              <a:rPr lang="en-US" sz="2000" dirty="0">
+              <a:rPr lang="en-US" dirty="0">
                 <a:solidFill>
                   <a:schemeClr val="accent1"/>
                 </a:solidFill>
@@ -9242,7 +9242,7 @@
               <a:t> if  </a:t>
             </a:r>
             <a:r>
-              <a:rPr lang="en-US" sz="2000" dirty="0">
+              <a:rPr lang="en-US" dirty="0">
                 <a:solidFill>
                   <a:schemeClr val="accent2"/>
                 </a:solidFill>
@@ -9254,7 +9254,7 @@
               <a:t>its only prime factors are 2, 3, or 5.</a:t>
             </a:r>
             <a:r>
-              <a:rPr lang="en-US" sz="2000" dirty="0">
+              <a:rPr lang="en-US" dirty="0">
                 <a:solidFill>
                   <a:schemeClr val="accent1"/>
                 </a:solidFill>
@@ -9309,7 +9309,7 @@
               <a:buNone/>
             </a:pPr>
             <a:r>
-              <a:rPr lang="en-US" sz="1600" dirty="0">
+              <a:rPr lang="en-US" dirty="0">
                 <a:solidFill>
                   <a:schemeClr val="accent2"/>
                 </a:solidFill>
@@ -9699,14 +9699,14 @@
               <a:buNone/>
             </a:pPr>
             <a:r>
-              <a:rPr lang="en-US" dirty="0">
+              <a:rPr lang="en-US" sz="2400" dirty="0">
                 <a:solidFill>
                   <a:schemeClr val="accent2"/>
                 </a:solidFill>
               </a:rPr>
               <a:t>Loops in Mathematics </a:t>
             </a:r>
-            <a:endParaRPr dirty="0">
+            <a:endParaRPr sz="2400" dirty="0">
               <a:solidFill>
                 <a:schemeClr val="accent2"/>
               </a:solidFill>
@@ -9904,8 +9904,8 @@
         </p:nvSpPr>
         <p:spPr>
           <a:xfrm>
-            <a:off x="1247158" y="1154707"/>
-            <a:ext cx="7677101" cy="944712"/>
+            <a:off x="1038286" y="1154707"/>
+            <a:ext cx="7885973" cy="944712"/>
           </a:xfrm>
           <a:prstGeom prst="rect">
             <a:avLst/>
@@ -9931,7 +9931,7 @@
               <a:buNone/>
             </a:pPr>
             <a:r>
-              <a:rPr lang="en-US" sz="1800" dirty="0">
+              <a:rPr lang="en-US" dirty="0">
                 <a:solidFill>
                   <a:schemeClr val="accent1"/>
                 </a:solidFill>
@@ -9943,7 +9943,7 @@
               <a:t>Binomial Expansion series is very popular in mathematics, which is shown in the below. </a:t>
             </a:r>
             <a:r>
-              <a:rPr lang="en-US" sz="1800" dirty="0">
+              <a:rPr lang="en-US" dirty="0">
                 <a:solidFill>
                   <a:srgbClr val="92D050"/>
                 </a:solidFill>
@@ -10435,7 +10435,7 @@
               <a:buNone/>
             </a:pPr>
             <a:r>
-              <a:rPr lang="en-US" sz="1600" dirty="0">
+              <a:rPr lang="en-US" dirty="0">
                 <a:solidFill>
                   <a:srgbClr val="92D050"/>
                 </a:solidFill>
@@ -10825,14 +10825,14 @@
               <a:buNone/>
             </a:pPr>
             <a:r>
-              <a:rPr lang="en-US" dirty="0">
+              <a:rPr lang="en-US" sz="2400" dirty="0">
                 <a:solidFill>
                   <a:schemeClr val="accent2"/>
                 </a:solidFill>
               </a:rPr>
               <a:t>Loops in Mathematics; </a:t>
             </a:r>
-            <a:endParaRPr dirty="0">
+            <a:endParaRPr sz="2400" dirty="0">
               <a:solidFill>
                 <a:schemeClr val="accent2"/>
               </a:solidFill>
@@ -11030,8 +11030,8 @@
         </p:nvSpPr>
         <p:spPr>
           <a:xfrm>
-            <a:off x="1240070" y="1174729"/>
-            <a:ext cx="7290600" cy="944712"/>
+            <a:off x="1143250" y="1088675"/>
+            <a:ext cx="7898030" cy="944712"/>
           </a:xfrm>
           <a:prstGeom prst="rect">
             <a:avLst/>
@@ -11047,7 +11047,7 @@
           </a:bodyPr>
           <a:lstStyle/>
           <a:p>
-            <a:pPr marL="0" lvl="0" indent="0" rtl="0">
+            <a:pPr marL="0" lvl="0" indent="0" algn="just" rtl="0">
               <a:spcBef>
                 <a:spcPts val="0"/>
               </a:spcBef>
@@ -11057,7 +11057,7 @@
               <a:buNone/>
             </a:pPr>
             <a:r>
-              <a:rPr lang="en-US" sz="1800" dirty="0">
+              <a:rPr lang="en-US" dirty="0">
                 <a:solidFill>
                   <a:schemeClr val="accent1"/>
                 </a:solidFill>
@@ -11069,7 +11069,7 @@
               <a:t>Binomial Expansion series is very popular in mathematics, which is shown in the below. </a:t>
             </a:r>
             <a:r>
-              <a:rPr lang="en-US" sz="1800" dirty="0">
+              <a:rPr lang="en-US" dirty="0">
                 <a:solidFill>
                   <a:srgbClr val="92D050"/>
                 </a:solidFill>
@@ -11534,7 +11534,7 @@
         </p:nvSpPr>
         <p:spPr>
           <a:xfrm>
-            <a:off x="1495238" y="3622563"/>
+            <a:off x="1396162" y="3538767"/>
             <a:ext cx="7747838" cy="1072162"/>
           </a:xfrm>
           <a:prstGeom prst="rect">
@@ -11561,7 +11561,7 @@
               <a:buNone/>
             </a:pPr>
             <a:r>
-              <a:rPr lang="en-US" sz="1600" dirty="0">
+              <a:rPr lang="en-US" dirty="0">
                 <a:solidFill>
                   <a:srgbClr val="92D050"/>
                 </a:solidFill>
@@ -11616,7 +11616,7 @@
               <a:buNone/>
             </a:pPr>
             <a:r>
-              <a:rPr lang="en-US" sz="1800" dirty="0">
+              <a:rPr lang="en-US" dirty="0">
                 <a:solidFill>
                   <a:schemeClr val="accent2"/>
                 </a:solidFill>
@@ -12006,7 +12006,7 @@
               <a:buNone/>
             </a:pPr>
             <a:r>
-              <a:rPr lang="en-US" dirty="0">
+              <a:rPr lang="en-US" sz="2400" dirty="0">
                 <a:solidFill>
                   <a:schemeClr val="accent2"/>
                 </a:solidFill>
@@ -12014,7 +12014,7 @@
               <a:t>G</a:t>
             </a:r>
             <a:r>
-              <a:rPr lang="en" dirty="0">
+              <a:rPr lang="en" sz="2400" dirty="0">
                 <a:solidFill>
                   <a:schemeClr val="accent2"/>
                 </a:solidFill>
@@ -12022,27 +12022,27 @@
               <a:t>enerating Pattern;</a:t>
             </a:r>
             <a:br>
-              <a:rPr lang="en" dirty="0">
+              <a:rPr lang="en" sz="2400" dirty="0">
                 <a:solidFill>
                   <a:schemeClr val="accent2"/>
                 </a:solidFill>
               </a:rPr>
             </a:br>
             <a:br>
-              <a:rPr lang="en" dirty="0">
+              <a:rPr lang="en" sz="2400" dirty="0">
                 <a:solidFill>
                   <a:schemeClr val="accent2"/>
                 </a:solidFill>
               </a:rPr>
             </a:br>
             <a:br>
-              <a:rPr lang="en" dirty="0">
+              <a:rPr lang="en" sz="2400" dirty="0">
                 <a:solidFill>
                   <a:schemeClr val="accent2"/>
                 </a:solidFill>
               </a:rPr>
             </a:br>
-            <a:endParaRPr dirty="0">
+            <a:endParaRPr sz="2400" dirty="0">
               <a:solidFill>
                 <a:schemeClr val="accent2"/>
               </a:solidFill>
@@ -12240,7 +12240,7 @@
         </p:nvSpPr>
         <p:spPr>
           <a:xfrm>
-            <a:off x="1519856" y="1173286"/>
+            <a:off x="1225860" y="1045687"/>
             <a:ext cx="7125380" cy="1020553"/>
           </a:xfrm>
           <a:prstGeom prst="rect">
@@ -12267,7 +12267,7 @@
               <a:buNone/>
             </a:pPr>
             <a:r>
-              <a:rPr lang="en-US" sz="2000" dirty="0">
+              <a:rPr lang="en-US" dirty="0">
                 <a:solidFill>
                   <a:schemeClr val="accent1"/>
                 </a:solidFill>

--- a/slides/5.Loop/Loop.pptx
+++ b/slides/5.Loop/Loop.pptx
@@ -27,17 +27,13 @@
   <p:notesSz cx="6858000" cy="9144000"/>
   <p:embeddedFontLst>
     <p:embeddedFont>
-      <p:font typeface="Arial Rounded MT Bold" panose="020F0704030504030204" pitchFamily="34" charset="0"/>
+      <p:font typeface="Cambria Math" panose="02040503050406030204" pitchFamily="18" charset="0"/>
       <p:regular r:id="rId17"/>
     </p:embeddedFont>
     <p:embeddedFont>
-      <p:font typeface="Cambria Math" panose="02040503050406030204" pitchFamily="18" charset="0"/>
+      <p:font typeface="Fira Code" panose="020B0809050000020004" pitchFamily="49" charset="0"/>
       <p:regular r:id="rId18"/>
-    </p:embeddedFont>
-    <p:embeddedFont>
-      <p:font typeface="Fira Code" panose="020B0809050000020004" pitchFamily="49" charset="0"/>
-      <p:regular r:id="rId19"/>
-      <p:bold r:id="rId20"/>
+      <p:bold r:id="rId19"/>
     </p:embeddedFont>
   </p:embeddedFontLst>
   <p:defaultTextStyle>
@@ -8871,6 +8867,73 @@
           </a:p>
         </p:txBody>
       </p:sp>
+      <p:sp>
+        <p:nvSpPr>
+          <p:cNvPr id="7" name="TextBox 6">
+            <a:extLst>
+              <a:ext uri="{FF2B5EF4-FFF2-40B4-BE49-F238E27FC236}">
+                <a16:creationId xmlns:a16="http://schemas.microsoft.com/office/drawing/2014/main" id="{6BF3604F-7476-D34F-BE6A-6C907076B116}"/>
+              </a:ext>
+            </a:extLst>
+          </p:cNvPr>
+          <p:cNvSpPr txBox="1"/>
+          <p:nvPr/>
+        </p:nvSpPr>
+        <p:spPr>
+          <a:xfrm>
+            <a:off x="1207159" y="1949871"/>
+            <a:ext cx="7435395" cy="261610"/>
+          </a:xfrm>
+          <a:prstGeom prst="rect">
+            <a:avLst/>
+          </a:prstGeom>
+          <a:noFill/>
+        </p:spPr>
+        <p:txBody>
+          <a:bodyPr wrap="square">
+            <a:spAutoFit/>
+          </a:bodyPr>
+          <a:lstStyle/>
+          <a:p>
+            <a:pPr>
+              <a:buNone/>
+            </a:pPr>
+            <a:r>
+              <a:rPr lang="en-US" sz="1100" dirty="0">
+                <a:solidFill>
+                  <a:srgbClr val="FF0000"/>
+                </a:solidFill>
+                <a:latin typeface="Fira Code" panose="020B0809050000020004" pitchFamily="49" charset="0"/>
+                <a:ea typeface="Fira Code" panose="020B0809050000020004" pitchFamily="49" charset="0"/>
+                <a:cs typeface="Fira Code" panose="020B0809050000020004" pitchFamily="49" charset="0"/>
+              </a:rPr>
+              <a:t>*For further reading, please refer to </a:t>
+            </a:r>
+            <a:r>
+              <a:rPr lang="en-US" sz="1100" b="1" dirty="0">
+                <a:solidFill>
+                  <a:srgbClr val="FF0000"/>
+                </a:solidFill>
+                <a:latin typeface="Fira Code" panose="020B0809050000020004" pitchFamily="49" charset="0"/>
+                <a:ea typeface="Fira Code" panose="020B0809050000020004" pitchFamily="49" charset="0"/>
+                <a:cs typeface="Fira Code" panose="020B0809050000020004" pitchFamily="49" charset="0"/>
+              </a:rPr>
+              <a:t>C How to Program</a:t>
+            </a:r>
+            <a:r>
+              <a:rPr lang="en-US" sz="1100" dirty="0">
+                <a:solidFill>
+                  <a:srgbClr val="FF0000"/>
+                </a:solidFill>
+                <a:latin typeface="Fira Code" panose="020B0809050000020004" pitchFamily="49" charset="0"/>
+                <a:ea typeface="Fira Code" panose="020B0809050000020004" pitchFamily="49" charset="0"/>
+                <a:cs typeface="Fira Code" panose="020B0809050000020004" pitchFamily="49" charset="0"/>
+              </a:rPr>
+              <a:t> by Deitel and Deitel</a:t>
+            </a:r>
+          </a:p>
+        </p:txBody>
+      </p:sp>
     </p:spTree>
     <p:extLst>
       <p:ext uri="{BB962C8B-B14F-4D97-AF65-F5344CB8AC3E}">
@@ -12220,13 +12283,18 @@
           <a:lstStyle/>
           <a:p>
             <a:r>
-              <a:rPr lang="en-US" sz="2400" dirty="0">
+              <a:rPr lang="en-US" sz="2400">
                 <a:solidFill>
                   <a:schemeClr val="accent2"/>
                 </a:solidFill>
               </a:rPr>
-              <a:t>Home Work</a:t>
-            </a:r>
+              <a:t>Homework</a:t>
+            </a:r>
+            <a:endParaRPr lang="en-US" sz="2400" dirty="0">
+              <a:solidFill>
+                <a:schemeClr val="accent2"/>
+              </a:solidFill>
+            </a:endParaRPr>
           </a:p>
         </p:txBody>
       </p:sp>
@@ -12324,7 +12392,7 @@
             <a:r>
               <a:rPr lang="en-US" altLang="en-US" dirty="0">
                 <a:solidFill>
-                  <a:schemeClr val="accent1"/>
+                  <a:schemeClr val="accent2"/>
                 </a:solidFill>
                 <a:latin typeface="Fira Code"/>
                 <a:ea typeface="Fira Code"/>
@@ -12335,7 +12403,7 @@
             <a:r>
               <a:rPr lang="en-US" altLang="en-US" b="1" dirty="0">
                 <a:solidFill>
-                  <a:schemeClr val="accent1"/>
+                  <a:schemeClr val="accent2"/>
                 </a:solidFill>
                 <a:latin typeface="Fira Code"/>
                 <a:ea typeface="Fira Code"/>
@@ -12346,7 +12414,7 @@
             <a:r>
               <a:rPr lang="en-US" altLang="en-US" dirty="0">
                 <a:solidFill>
-                  <a:schemeClr val="accent1"/>
+                  <a:schemeClr val="accent2"/>
                 </a:solidFill>
                 <a:latin typeface="Fira Code"/>
                 <a:ea typeface="Fira Code"/>
@@ -12436,7 +12504,29 @@
                 <a:ea typeface="Fira Code"/>
                 <a:cs typeface="Fira Code"/>
               </a:rPr>
-              <a:t>Calculate and print the maximum absolute difference between any two consecutive grades.</a:t>
+              <a:t>Calculate and print the </a:t>
+            </a:r>
+            <a:r>
+              <a:rPr lang="en-US" altLang="en-US" dirty="0">
+                <a:solidFill>
+                  <a:schemeClr val="accent2"/>
+                </a:solidFill>
+                <a:latin typeface="Fira Code"/>
+                <a:ea typeface="Fira Code"/>
+                <a:cs typeface="Fira Code"/>
+              </a:rPr>
+              <a:t>maximum absolute difference</a:t>
+            </a:r>
+            <a:r>
+              <a:rPr lang="en-US" altLang="en-US" dirty="0">
+                <a:solidFill>
+                  <a:schemeClr val="accent1"/>
+                </a:solidFill>
+                <a:latin typeface="Fira Code"/>
+                <a:ea typeface="Fira Code"/>
+                <a:cs typeface="Fira Code"/>
+              </a:rPr>
+              <a:t> between any two consecutive grades.</a:t>
             </a:r>
             <a:endParaRPr lang="fa-IR" altLang="en-US" dirty="0">
               <a:solidFill>
@@ -12499,7 +12589,29 @@
                 <a:ea typeface="Fira Code"/>
                 <a:cs typeface="Fira Code"/>
               </a:rPr>
-              <a:t>Also print the two grades that caused this maximum difference.</a:t>
+              <a:t>Also print the two grades that caused this </a:t>
+            </a:r>
+            <a:r>
+              <a:rPr lang="en-US" altLang="en-US" dirty="0">
+                <a:solidFill>
+                  <a:schemeClr val="accent2"/>
+                </a:solidFill>
+                <a:latin typeface="Fira Code"/>
+                <a:ea typeface="Fira Code"/>
+                <a:cs typeface="Fira Code"/>
+              </a:rPr>
+              <a:t>maximum difference</a:t>
+            </a:r>
+            <a:r>
+              <a:rPr lang="en-US" altLang="en-US" dirty="0">
+                <a:solidFill>
+                  <a:schemeClr val="accent1"/>
+                </a:solidFill>
+                <a:latin typeface="Fira Code"/>
+                <a:ea typeface="Fira Code"/>
+                <a:cs typeface="Fira Code"/>
+              </a:rPr>
+              <a:t>.</a:t>
             </a:r>
             <a:endParaRPr lang="fa-IR" altLang="en-US" dirty="0">
               <a:solidFill>
@@ -12585,7 +12697,7 @@
             <a:r>
               <a:rPr lang="en-US" altLang="en-US" dirty="0">
                 <a:solidFill>
-                  <a:schemeClr val="accent1"/>
+                  <a:schemeClr val="accent2"/>
                 </a:solidFill>
                 <a:latin typeface="Fira Code"/>
                 <a:ea typeface="Fira Code"/>
@@ -15134,12 +15246,45 @@
                 <a:ea typeface="Fira Code"/>
                 <a:cs typeface="Fira Code"/>
               </a:rPr>
-              <a:t>In this example, we apply counter-controlled repetition, where a variable (counter) determines how many times a set of actions should run. Since the number of repetitions is known (10 times for 10 students), this is called </a:t>
+              <a:t>In this example, we apply </a:t>
+            </a:r>
+            <a:r>
+              <a:rPr lang="en-US" dirty="0">
+                <a:solidFill>
+                  <a:schemeClr val="accent2"/>
+                </a:solidFill>
+                <a:latin typeface="Fira Code"/>
+                <a:ea typeface="Fira Code"/>
+                <a:cs typeface="Fira Code"/>
+              </a:rPr>
+              <a:t>counter-controlled repetition</a:t>
+            </a:r>
+            <a:r>
+              <a:rPr lang="en-US" dirty="0">
+                <a:solidFill>
+                  <a:schemeClr val="accent1"/>
+                </a:solidFill>
+                <a:latin typeface="Fira Code"/>
+                <a:ea typeface="Fira Code"/>
+                <a:cs typeface="Fira Code"/>
+              </a:rPr>
+              <a:t>, where a variable (counter) determines how many times a set of actions should run. Since the number of repetitions is known (10 times for 10 students), this is called</a:t>
+            </a:r>
+            <a:r>
+              <a:rPr lang="en-US" dirty="0">
+                <a:solidFill>
+                  <a:schemeClr val="accent2"/>
+                </a:solidFill>
+                <a:latin typeface="Fira Code"/>
+                <a:ea typeface="Fira Code"/>
+                <a:cs typeface="Fira Code"/>
+              </a:rPr>
+              <a:t> </a:t>
             </a:r>
             <a:r>
               <a:rPr lang="en-US" b="1" dirty="0">
                 <a:solidFill>
-                  <a:schemeClr val="accent1"/>
+                  <a:schemeClr val="accent2"/>
                 </a:solidFill>
                 <a:latin typeface="Fira Code"/>
                 <a:ea typeface="Fira Code"/>
@@ -15923,8 +16068,9 @@
                 <a:solidFill>
                   <a:schemeClr val="accent1"/>
                 </a:solidFill>
-                <a:latin typeface="Arial Rounded MT Bold" panose="020F0704030504030204" pitchFamily="34" charset="0"/>
-                <a:cs typeface="Times New Roman" panose="02020603050405020304" pitchFamily="18" charset="0"/>
+                <a:latin typeface="Fira Code" panose="020B0809050000020004" pitchFamily="49" charset="0"/>
+                <a:ea typeface="Fira Code" panose="020B0809050000020004" pitchFamily="49" charset="0"/>
+                <a:cs typeface="Fira Code" panose="020B0809050000020004" pitchFamily="49" charset="0"/>
               </a:rPr>
               <a:t> Set total to zero </a:t>
             </a:r>
@@ -15946,10 +16092,33 @@
                 <a:solidFill>
                   <a:schemeClr val="accent1"/>
                 </a:solidFill>
-                <a:latin typeface="Arial Rounded MT Bold" panose="020F0704030504030204" pitchFamily="34" charset="0"/>
-                <a:cs typeface="Times New Roman" panose="02020603050405020304" pitchFamily="18" charset="0"/>
-              </a:rPr>
-              <a:t> Set grade counter to one </a:t>
+                <a:latin typeface="Fira Code" panose="020B0809050000020004" pitchFamily="49" charset="0"/>
+                <a:ea typeface="Fira Code" panose="020B0809050000020004" pitchFamily="49" charset="0"/>
+                <a:cs typeface="Fira Code" panose="020B0809050000020004" pitchFamily="49" charset="0"/>
+              </a:rPr>
+              <a:t> Set grade </a:t>
+            </a:r>
+            <a:r>
+              <a:rPr lang="en-US" sz="1400" dirty="0">
+                <a:solidFill>
+                  <a:schemeClr val="accent2"/>
+                </a:solidFill>
+                <a:latin typeface="Fira Code" panose="020B0809050000020004" pitchFamily="49" charset="0"/>
+                <a:ea typeface="Fira Code" panose="020B0809050000020004" pitchFamily="49" charset="0"/>
+                <a:cs typeface="Fira Code" panose="020B0809050000020004" pitchFamily="49" charset="0"/>
+              </a:rPr>
+              <a:t>counter</a:t>
+            </a:r>
+            <a:r>
+              <a:rPr lang="en-US" sz="1400" dirty="0">
+                <a:solidFill>
+                  <a:schemeClr val="accent1"/>
+                </a:solidFill>
+                <a:latin typeface="Fira Code" panose="020B0809050000020004" pitchFamily="49" charset="0"/>
+                <a:ea typeface="Fira Code" panose="020B0809050000020004" pitchFamily="49" charset="0"/>
+                <a:cs typeface="Fira Code" panose="020B0809050000020004" pitchFamily="49" charset="0"/>
+              </a:rPr>
+              <a:t> to one </a:t>
             </a:r>
           </a:p>
           <a:p>
@@ -15969,8 +16138,9 @@
                 <a:solidFill>
                   <a:schemeClr val="accent1"/>
                 </a:solidFill>
-                <a:latin typeface="Arial Rounded MT Bold" panose="020F0704030504030204" pitchFamily="34" charset="0"/>
-                <a:cs typeface="Times New Roman" panose="02020603050405020304" pitchFamily="18" charset="0"/>
+                <a:latin typeface="Fira Code" panose="020B0809050000020004" pitchFamily="49" charset="0"/>
+                <a:ea typeface="Fira Code" panose="020B0809050000020004" pitchFamily="49" charset="0"/>
+                <a:cs typeface="Fira Code" panose="020B0809050000020004" pitchFamily="49" charset="0"/>
               </a:rPr>
               <a:t> </a:t>
             </a:r>
@@ -15992,10 +16162,33 @@
                 <a:solidFill>
                   <a:schemeClr val="accent1"/>
                 </a:solidFill>
-                <a:latin typeface="Arial Rounded MT Bold" panose="020F0704030504030204" pitchFamily="34" charset="0"/>
-                <a:cs typeface="Times New Roman" panose="02020603050405020304" pitchFamily="18" charset="0"/>
-              </a:rPr>
-              <a:t> While grade counter is less than or equal to ten </a:t>
+                <a:latin typeface="Fira Code" panose="020B0809050000020004" pitchFamily="49" charset="0"/>
+                <a:ea typeface="Fira Code" panose="020B0809050000020004" pitchFamily="49" charset="0"/>
+                <a:cs typeface="Fira Code" panose="020B0809050000020004" pitchFamily="49" charset="0"/>
+              </a:rPr>
+              <a:t> While grade </a:t>
+            </a:r>
+            <a:r>
+              <a:rPr lang="en-US" sz="1400" dirty="0">
+                <a:solidFill>
+                  <a:schemeClr val="accent2"/>
+                </a:solidFill>
+                <a:latin typeface="Fira Code" panose="020B0809050000020004" pitchFamily="49" charset="0"/>
+                <a:ea typeface="Fira Code" panose="020B0809050000020004" pitchFamily="49" charset="0"/>
+                <a:cs typeface="Fira Code" panose="020B0809050000020004" pitchFamily="49" charset="0"/>
+              </a:rPr>
+              <a:t>counter</a:t>
+            </a:r>
+            <a:r>
+              <a:rPr lang="en-US" sz="1400" dirty="0">
+                <a:solidFill>
+                  <a:schemeClr val="accent1"/>
+                </a:solidFill>
+                <a:latin typeface="Fira Code" panose="020B0809050000020004" pitchFamily="49" charset="0"/>
+                <a:ea typeface="Fira Code" panose="020B0809050000020004" pitchFamily="49" charset="0"/>
+                <a:cs typeface="Fira Code" panose="020B0809050000020004" pitchFamily="49" charset="0"/>
+              </a:rPr>
+              <a:t> is less than or equal to ten </a:t>
             </a:r>
           </a:p>
           <a:p>
@@ -16015,8 +16208,9 @@
                 <a:solidFill>
                   <a:schemeClr val="accent1"/>
                 </a:solidFill>
-                <a:latin typeface="Arial Rounded MT Bold" panose="020F0704030504030204" pitchFamily="34" charset="0"/>
-                <a:cs typeface="Times New Roman" panose="02020603050405020304" pitchFamily="18" charset="0"/>
+                <a:latin typeface="Fira Code" panose="020B0809050000020004" pitchFamily="49" charset="0"/>
+                <a:ea typeface="Fira Code" panose="020B0809050000020004" pitchFamily="49" charset="0"/>
+                <a:cs typeface="Fira Code" panose="020B0809050000020004" pitchFamily="49" charset="0"/>
               </a:rPr>
               <a:t> Input the next grade </a:t>
             </a:r>
@@ -16038,10 +16232,33 @@
                 <a:solidFill>
                   <a:schemeClr val="accent1"/>
                 </a:solidFill>
-                <a:latin typeface="Arial Rounded MT Bold" panose="020F0704030504030204" pitchFamily="34" charset="0"/>
-                <a:cs typeface="Times New Roman" panose="02020603050405020304" pitchFamily="18" charset="0"/>
-              </a:rPr>
-              <a:t> Add the grade into the total </a:t>
+                <a:latin typeface="Fira Code" panose="020B0809050000020004" pitchFamily="49" charset="0"/>
+                <a:ea typeface="Fira Code" panose="020B0809050000020004" pitchFamily="49" charset="0"/>
+                <a:cs typeface="Fira Code" panose="020B0809050000020004" pitchFamily="49" charset="0"/>
+              </a:rPr>
+              <a:t> Add the grade into the </a:t>
+            </a:r>
+            <a:r>
+              <a:rPr lang="en-US" sz="1400" dirty="0">
+                <a:solidFill>
+                  <a:schemeClr val="accent2"/>
+                </a:solidFill>
+                <a:latin typeface="Fira Code" panose="020B0809050000020004" pitchFamily="49" charset="0"/>
+                <a:ea typeface="Fira Code" panose="020B0809050000020004" pitchFamily="49" charset="0"/>
+                <a:cs typeface="Fira Code" panose="020B0809050000020004" pitchFamily="49" charset="0"/>
+              </a:rPr>
+              <a:t>total</a:t>
+            </a:r>
+            <a:r>
+              <a:rPr lang="en-US" sz="1400" dirty="0">
+                <a:solidFill>
+                  <a:schemeClr val="accent1"/>
+                </a:solidFill>
+                <a:latin typeface="Fira Code" panose="020B0809050000020004" pitchFamily="49" charset="0"/>
+                <a:ea typeface="Fira Code" panose="020B0809050000020004" pitchFamily="49" charset="0"/>
+                <a:cs typeface="Fira Code" panose="020B0809050000020004" pitchFamily="49" charset="0"/>
+              </a:rPr>
+              <a:t> </a:t>
             </a:r>
           </a:p>
           <a:p>
@@ -16061,10 +16278,33 @@
                 <a:solidFill>
                   <a:schemeClr val="accent1"/>
                 </a:solidFill>
-                <a:latin typeface="Arial Rounded MT Bold" panose="020F0704030504030204" pitchFamily="34" charset="0"/>
-                <a:cs typeface="Times New Roman" panose="02020603050405020304" pitchFamily="18" charset="0"/>
-              </a:rPr>
-              <a:t> Add one to the grade counter </a:t>
+                <a:latin typeface="Fira Code" panose="020B0809050000020004" pitchFamily="49" charset="0"/>
+                <a:ea typeface="Fira Code" panose="020B0809050000020004" pitchFamily="49" charset="0"/>
+                <a:cs typeface="Fira Code" panose="020B0809050000020004" pitchFamily="49" charset="0"/>
+              </a:rPr>
+              <a:t> Add one to the grade </a:t>
+            </a:r>
+            <a:r>
+              <a:rPr lang="en-US" sz="1400" dirty="0">
+                <a:solidFill>
+                  <a:schemeClr val="accent2"/>
+                </a:solidFill>
+                <a:latin typeface="Fira Code" panose="020B0809050000020004" pitchFamily="49" charset="0"/>
+                <a:ea typeface="Fira Code" panose="020B0809050000020004" pitchFamily="49" charset="0"/>
+                <a:cs typeface="Fira Code" panose="020B0809050000020004" pitchFamily="49" charset="0"/>
+              </a:rPr>
+              <a:t>counter</a:t>
+            </a:r>
+            <a:r>
+              <a:rPr lang="en-US" sz="1400" dirty="0">
+                <a:solidFill>
+                  <a:schemeClr val="accent1"/>
+                </a:solidFill>
+                <a:latin typeface="Fira Code" panose="020B0809050000020004" pitchFamily="49" charset="0"/>
+                <a:ea typeface="Fira Code" panose="020B0809050000020004" pitchFamily="49" charset="0"/>
+                <a:cs typeface="Fira Code" panose="020B0809050000020004" pitchFamily="49" charset="0"/>
+              </a:rPr>
+              <a:t> </a:t>
             </a:r>
           </a:p>
           <a:p>
@@ -16084,8 +16324,9 @@
                 <a:solidFill>
                   <a:schemeClr val="accent1"/>
                 </a:solidFill>
-                <a:latin typeface="Arial Rounded MT Bold" panose="020F0704030504030204" pitchFamily="34" charset="0"/>
-                <a:cs typeface="Times New Roman" panose="02020603050405020304" pitchFamily="18" charset="0"/>
+                <a:latin typeface="Fira Code" panose="020B0809050000020004" pitchFamily="49" charset="0"/>
+                <a:ea typeface="Fira Code" panose="020B0809050000020004" pitchFamily="49" charset="0"/>
+                <a:cs typeface="Fira Code" panose="020B0809050000020004" pitchFamily="49" charset="0"/>
               </a:rPr>
               <a:t> </a:t>
             </a:r>
@@ -16107,10 +16348,33 @@
                 <a:solidFill>
                   <a:schemeClr val="accent1"/>
                 </a:solidFill>
-                <a:latin typeface="Arial Rounded MT Bold" panose="020F0704030504030204" pitchFamily="34" charset="0"/>
-                <a:cs typeface="Times New Roman" panose="02020603050405020304" pitchFamily="18" charset="0"/>
-              </a:rPr>
-              <a:t> Set the class average to the total divided by ten </a:t>
+                <a:latin typeface="Fira Code" panose="020B0809050000020004" pitchFamily="49" charset="0"/>
+                <a:ea typeface="Fira Code" panose="020B0809050000020004" pitchFamily="49" charset="0"/>
+                <a:cs typeface="Fira Code" panose="020B0809050000020004" pitchFamily="49" charset="0"/>
+              </a:rPr>
+              <a:t> Set the class average to the </a:t>
+            </a:r>
+            <a:r>
+              <a:rPr lang="en-US" sz="1400" dirty="0">
+                <a:solidFill>
+                  <a:schemeClr val="accent2"/>
+                </a:solidFill>
+                <a:latin typeface="Fira Code" panose="020B0809050000020004" pitchFamily="49" charset="0"/>
+                <a:ea typeface="Fira Code" panose="020B0809050000020004" pitchFamily="49" charset="0"/>
+                <a:cs typeface="Fira Code" panose="020B0809050000020004" pitchFamily="49" charset="0"/>
+              </a:rPr>
+              <a:t>total</a:t>
+            </a:r>
+            <a:r>
+              <a:rPr lang="en-US" sz="1400" dirty="0">
+                <a:solidFill>
+                  <a:schemeClr val="accent1"/>
+                </a:solidFill>
+                <a:latin typeface="Fira Code" panose="020B0809050000020004" pitchFamily="49" charset="0"/>
+                <a:ea typeface="Fira Code" panose="020B0809050000020004" pitchFamily="49" charset="0"/>
+                <a:cs typeface="Fira Code" panose="020B0809050000020004" pitchFamily="49" charset="0"/>
+              </a:rPr>
+              <a:t> divided by ten </a:t>
             </a:r>
           </a:p>
           <a:p>
@@ -16130,14 +16394,16 @@
                 <a:solidFill>
                   <a:schemeClr val="accent1"/>
                 </a:solidFill>
-                <a:latin typeface="Arial Rounded MT Bold" panose="020F0704030504030204" pitchFamily="34" charset="0"/>
-                <a:cs typeface="Times New Roman" panose="02020603050405020304" pitchFamily="18" charset="0"/>
+                <a:latin typeface="Fira Code" panose="020B0809050000020004" pitchFamily="49" charset="0"/>
+                <a:ea typeface="Fira Code" panose="020B0809050000020004" pitchFamily="49" charset="0"/>
+                <a:cs typeface="Fira Code" panose="020B0809050000020004" pitchFamily="49" charset="0"/>
               </a:rPr>
               <a:t> Print the class average</a:t>
             </a:r>
             <a:endParaRPr lang="en-US" sz="1400" dirty="0">
-              <a:latin typeface="Arial Rounded MT Bold" panose="020F0704030504030204" pitchFamily="34" charset="0"/>
-              <a:cs typeface="Times New Roman" panose="02020603050405020304" pitchFamily="18" charset="0"/>
+              <a:latin typeface="Fira Code" panose="020B0809050000020004" pitchFamily="49" charset="0"/>
+              <a:ea typeface="Fira Code" panose="020B0809050000020004" pitchFamily="49" charset="0"/>
+              <a:cs typeface="Fira Code" panose="020B0809050000020004" pitchFamily="49" charset="0"/>
             </a:endParaRPr>
           </a:p>
         </p:txBody>
@@ -18595,7 +18861,7 @@
         </p:nvSpPr>
         <p:spPr>
           <a:xfrm>
-            <a:off x="1019113" y="1230137"/>
+            <a:off x="907026" y="1138154"/>
             <a:ext cx="8036397" cy="3108543"/>
           </a:xfrm>
           <a:prstGeom prst="rect">
@@ -18639,29 +18905,29 @@
             <a:r>
               <a:rPr lang="en-US" altLang="en-US" b="1" dirty="0">
                 <a:solidFill>
+                  <a:schemeClr val="accent2"/>
+                </a:solidFill>
+                <a:latin typeface="Fira Code"/>
+                <a:ea typeface="Fira Code"/>
+                <a:cs typeface="Fira Code"/>
+              </a:rPr>
+              <a:t>total</a:t>
+            </a:r>
+            <a:r>
+              <a:rPr lang="en-US" altLang="en-US" dirty="0">
+                <a:solidFill>
                   <a:schemeClr val="accent1"/>
                 </a:solidFill>
                 <a:latin typeface="Fira Code"/>
                 <a:ea typeface="Fira Code"/>
                 <a:cs typeface="Fira Code"/>
               </a:rPr>
-              <a:t>total</a:t>
-            </a:r>
-            <a:r>
-              <a:rPr lang="en-US" altLang="en-US" dirty="0">
-                <a:solidFill>
-                  <a:schemeClr val="accent1"/>
-                </a:solidFill>
-                <a:latin typeface="Fira Code"/>
-                <a:ea typeface="Fira Code"/>
-                <a:cs typeface="Fira Code"/>
-              </a:rPr>
               <a:t> and </a:t>
             </a:r>
             <a:r>
               <a:rPr lang="en-US" altLang="en-US" b="1" dirty="0">
                 <a:solidFill>
-                  <a:schemeClr val="accent1"/>
+                  <a:schemeClr val="accent2"/>
                 </a:solidFill>
                 <a:latin typeface="Fira Code"/>
                 <a:ea typeface="Fira Code"/>
@@ -18817,7 +19083,29 @@
                 <a:ea typeface="Fira Code"/>
                 <a:cs typeface="Fira Code"/>
               </a:rPr>
-              <a:t>Since the counter goes from 1 to 10 (non-negative values), it is declared as an unsigned int.</a:t>
+              <a:t>Since the counter goes from 1 to 10 (non-negative values), it is declared as an </a:t>
+            </a:r>
+            <a:r>
+              <a:rPr lang="en-US" altLang="en-US" dirty="0">
+                <a:solidFill>
+                  <a:schemeClr val="accent2"/>
+                </a:solidFill>
+                <a:latin typeface="Fira Code"/>
+                <a:ea typeface="Fira Code"/>
+                <a:cs typeface="Fira Code"/>
+              </a:rPr>
+              <a:t>unsigned</a:t>
+            </a:r>
+            <a:r>
+              <a:rPr lang="en-US" altLang="en-US" dirty="0">
+                <a:solidFill>
+                  <a:schemeClr val="accent1"/>
+                </a:solidFill>
+                <a:latin typeface="Fira Code"/>
+                <a:ea typeface="Fira Code"/>
+                <a:cs typeface="Fira Code"/>
+              </a:rPr>
+              <a:t> int.</a:t>
             </a:r>
           </a:p>
           <a:p>
@@ -18856,7 +19144,29 @@
                 <a:ea typeface="Fira Code"/>
                 <a:cs typeface="Fira Code"/>
               </a:rPr>
-              <a:t>Variables like total should always be initialized to zero before use to avoid incorrect results from leftover memory values.</a:t>
+              <a:t>Variables like total </a:t>
+            </a:r>
+            <a:r>
+              <a:rPr lang="en-US" altLang="en-US" dirty="0">
+                <a:solidFill>
+                  <a:schemeClr val="accent2"/>
+                </a:solidFill>
+                <a:latin typeface="Fira Code"/>
+                <a:ea typeface="Fira Code"/>
+                <a:cs typeface="Fira Code"/>
+              </a:rPr>
+              <a:t>should always be initialized to zero </a:t>
+            </a:r>
+            <a:r>
+              <a:rPr lang="en-US" altLang="en-US" dirty="0">
+                <a:solidFill>
+                  <a:schemeClr val="accent1"/>
+                </a:solidFill>
+                <a:latin typeface="Fira Code"/>
+                <a:ea typeface="Fira Code"/>
+                <a:cs typeface="Fira Code"/>
+              </a:rPr>
+              <a:t>before use to avoid incorrect results from leftover memory values.</a:t>
             </a:r>
           </a:p>
           <a:p>
@@ -18911,7 +19221,29 @@
                 <a:ea typeface="Fira Code"/>
                 <a:cs typeface="Fira Code"/>
               </a:rPr>
-              <a:t>Counters are typically initialized to 0 or 1, depending on the context.</a:t>
+              <a:t>Counters are typically </a:t>
+            </a:r>
+            <a:r>
+              <a:rPr lang="en-US" altLang="en-US" dirty="0">
+                <a:solidFill>
+                  <a:schemeClr val="accent2"/>
+                </a:solidFill>
+                <a:latin typeface="Fira Code"/>
+                <a:ea typeface="Fira Code"/>
+                <a:cs typeface="Fira Code"/>
+              </a:rPr>
+              <a:t>initialized to 0 or 1</a:t>
+            </a:r>
+            <a:r>
+              <a:rPr lang="en-US" altLang="en-US" dirty="0">
+                <a:solidFill>
+                  <a:schemeClr val="accent1"/>
+                </a:solidFill>
+                <a:latin typeface="Fira Code"/>
+                <a:ea typeface="Fira Code"/>
+                <a:cs typeface="Fira Code"/>
+              </a:rPr>
+              <a:t>, depending on the context.</a:t>
             </a:r>
             <a:br>
               <a:rPr lang="en-US" altLang="en-US" dirty="0">
@@ -18937,46 +19269,57 @@
             <a:r>
               <a:rPr lang="en-US" altLang="en-US" b="1" dirty="0">
                 <a:solidFill>
+                  <a:schemeClr val="accent2"/>
+                </a:solidFill>
+                <a:latin typeface="Fira Code"/>
+                <a:ea typeface="Fira Code"/>
+                <a:cs typeface="Fira Code"/>
+              </a:rPr>
+              <a:t>garbage</a:t>
+            </a:r>
+            <a:r>
+              <a:rPr lang="en-US" altLang="en-US" dirty="0">
+                <a:solidFill>
+                  <a:schemeClr val="accent2"/>
+                </a:solidFill>
+                <a:latin typeface="Fira Code"/>
+                <a:ea typeface="Fira Code"/>
+                <a:cs typeface="Fira Code"/>
+              </a:rPr>
+              <a:t> </a:t>
+            </a:r>
+            <a:r>
+              <a:rPr lang="en-US" altLang="en-US" b="1" dirty="0">
+                <a:solidFill>
+                  <a:schemeClr val="accent2"/>
+                </a:solidFill>
+                <a:latin typeface="Fira Code"/>
+                <a:ea typeface="Fira Code"/>
+                <a:cs typeface="Fira Code"/>
+              </a:rPr>
+              <a:t>value</a:t>
+            </a:r>
+            <a:r>
+              <a:rPr lang="en-US" altLang="en-US" dirty="0">
+                <a:solidFill>
+                  <a:schemeClr val="accent2"/>
+                </a:solidFill>
+                <a:latin typeface="Fira Code"/>
+                <a:ea typeface="Fira Code"/>
+                <a:cs typeface="Fira Code"/>
+              </a:rPr>
+              <a:t> </a:t>
+            </a:r>
+            <a:r>
+              <a:rPr lang="en-US" altLang="en-US" dirty="0">
+                <a:solidFill>
                   <a:schemeClr val="accent1"/>
                 </a:solidFill>
                 <a:latin typeface="Fira Code"/>
                 <a:ea typeface="Fira Code"/>
                 <a:cs typeface="Fira Code"/>
               </a:rPr>
-              <a:t>garbage</a:t>
-            </a:r>
-            <a:r>
-              <a:rPr lang="en-US" altLang="en-US" dirty="0">
-                <a:solidFill>
-                  <a:schemeClr val="accent1"/>
-                </a:solidFill>
-                <a:latin typeface="Fira Code"/>
-                <a:ea typeface="Fira Code"/>
-                <a:cs typeface="Fira Code"/>
-              </a:rPr>
-              <a:t> </a:t>
-            </a:r>
-            <a:r>
-              <a:rPr lang="en-US" altLang="en-US" b="1" dirty="0">
-                <a:solidFill>
-                  <a:schemeClr val="accent1"/>
-                </a:solidFill>
-                <a:latin typeface="Fira Code"/>
-                <a:ea typeface="Fira Code"/>
-                <a:cs typeface="Fira Code"/>
-              </a:rPr>
-              <a:t>value</a:t>
-            </a:r>
-            <a:r>
-              <a:rPr lang="en-US" altLang="en-US" dirty="0">
-                <a:solidFill>
-                  <a:schemeClr val="accent1"/>
-                </a:solidFill>
-                <a:latin typeface="Fira Code"/>
-                <a:ea typeface="Fira Code"/>
-                <a:cs typeface="Fira Code"/>
-              </a:rPr>
-              <a:t> — a leftover value in memory that can cause errors.</a:t>
+              <a:t>— a leftover value in memory that can cause errors.</a:t>
             </a:r>
           </a:p>
         </p:txBody>
@@ -18999,8 +19342,8 @@
         </p:nvSpPr>
         <p:spPr>
           <a:xfrm>
-            <a:off x="1019113" y="553117"/>
-            <a:ext cx="7291388" cy="541337"/>
+            <a:off x="1019113" y="553118"/>
+            <a:ext cx="7291388" cy="137108"/>
           </a:xfrm>
         </p:spPr>
         <p:txBody>
@@ -19839,6 +20182,18 @@
             <a:r>
               <a:rPr lang="en-US" altLang="en-US" b="1" dirty="0">
                 <a:solidFill>
+                  <a:schemeClr val="accent2"/>
+                </a:solidFill>
+                <a:latin typeface="Fira Code"/>
+                <a:ea typeface="Fira Code"/>
+                <a:cs typeface="Fira Code"/>
+                <a:sym typeface="Fira Code"/>
+              </a:rPr>
+              <a:t>sentinel-controlled repetition</a:t>
+            </a:r>
+            <a:r>
+              <a:rPr lang="en-US" altLang="en-US" dirty="0">
+                <a:solidFill>
                   <a:schemeClr val="accent1"/>
                 </a:solidFill>
                 <a:latin typeface="Fira Code"/>
@@ -19846,11 +20201,23 @@
                 <a:cs typeface="Fira Code"/>
                 <a:sym typeface="Fira Code"/>
               </a:rPr>
-              <a:t>sentinel-controlled repetition</a:t>
+              <a:t>, where the user enters grades one by one, and a special value called a </a:t>
             </a:r>
             <a:r>
               <a:rPr lang="en-US" altLang="en-US" dirty="0">
                 <a:solidFill>
+                  <a:schemeClr val="accent2"/>
+                </a:solidFill>
+                <a:latin typeface="Fira Code"/>
+                <a:ea typeface="Fira Code"/>
+                <a:cs typeface="Fira Code"/>
+                <a:sym typeface="Fira Code"/>
+              </a:rPr>
+              <a:t>sentinel (e.g., -1) </a:t>
+            </a:r>
+            <a:r>
+              <a:rPr lang="en-US" altLang="en-US" dirty="0">
+                <a:solidFill>
                   <a:schemeClr val="accent1"/>
                 </a:solidFill>
                 <a:latin typeface="Fira Code"/>
@@ -19858,7 +20225,7 @@
                 <a:cs typeface="Fira Code"/>
                 <a:sym typeface="Fira Code"/>
               </a:rPr>
-              <a:t>, where the user enters grades one by one, and a special value called a sentinel (e.g., -1) is entered to indicate the end of input. This value must be clearly distinct from valid grades—since grades are nonnegative, -1 works well. </a:t>
+              <a:t>is entered to indicate the end of input. This value must be clearly distinct from valid grades—since grades are nonnegative, -1 works well. </a:t>
             </a:r>
           </a:p>
         </p:txBody>
@@ -19906,7 +20273,7 @@
             <a:r>
               <a:rPr lang="en-US" b="1" dirty="0">
                 <a:solidFill>
-                  <a:schemeClr val="accent1"/>
+                  <a:schemeClr val="accent2"/>
                 </a:solidFill>
                 <a:latin typeface="Fira Code"/>
                 <a:ea typeface="Fira Code"/>

--- a/slides/5.Loop/Loop.pptx
+++ b/slides/5.Loop/Loop.pptx
@@ -12225,7 +12225,7 @@
                   <a:schemeClr val="accent2"/>
                 </a:solidFill>
               </a:rPr>
-              <a:t>Home Work</a:t>
+              <a:t>Homework</a:t>
             </a:r>
           </a:p>
         </p:txBody>

--- a/slides/5.Loop/Loop.pptx
+++ b/slides/5.Loop/Loop.pptx
@@ -14626,7 +14626,7 @@
         </p:nvSpPr>
         <p:spPr>
           <a:xfrm>
-            <a:off x="1236767" y="3136552"/>
+            <a:off x="1199033" y="3142452"/>
             <a:ext cx="7553941" cy="944712"/>
           </a:xfrm>
           <a:prstGeom prst="rect">
@@ -16890,7 +16890,9 @@
             <a:ext cx="7675061" cy="3777580"/>
           </a:xfrm>
           <a:prstGeom prst="roundRect">
-            <a:avLst/>
+            <a:avLst>
+              <a:gd name="adj" fmla="val 3080"/>
+            </a:avLst>
           </a:prstGeom>
           <a:solidFill>
             <a:schemeClr val="accent5"/>

--- a/slides/5.Loop/Loop.pptx
+++ b/slides/5.Loop/Loop.pptx
@@ -5,7 +5,7 @@
     <p:sldMasterId id="2147483672" r:id="rId1"/>
   </p:sldMasterIdLst>
   <p:notesMasterIdLst>
-    <p:notesMasterId r:id="rId16"/>
+    <p:notesMasterId r:id="rId17"/>
   </p:notesMasterIdLst>
   <p:sldIdLst>
     <p:sldId id="256" r:id="rId2"/>
@@ -22,22 +22,23 @@
     <p:sldId id="317" r:id="rId13"/>
     <p:sldId id="302" r:id="rId14"/>
     <p:sldId id="324" r:id="rId15"/>
+    <p:sldId id="325" r:id="rId16"/>
   </p:sldIdLst>
   <p:sldSz cx="9144000" cy="5143500" type="screen16x9"/>
   <p:notesSz cx="6858000" cy="9144000"/>
   <p:embeddedFontLst>
     <p:embeddedFont>
       <p:font typeface="Arial Rounded MT Bold" panose="020F0704030504030204" pitchFamily="34" charset="0"/>
-      <p:regular r:id="rId17"/>
+      <p:regular r:id="rId18"/>
     </p:embeddedFont>
     <p:embeddedFont>
       <p:font typeface="Cambria Math" panose="02040503050406030204" pitchFamily="18" charset="0"/>
-      <p:regular r:id="rId18"/>
+      <p:regular r:id="rId19"/>
     </p:embeddedFont>
     <p:embeddedFont>
       <p:font typeface="Fira Code" panose="020B0809050000020004" pitchFamily="49" charset="0"/>
-      <p:regular r:id="rId19"/>
-      <p:bold r:id="rId20"/>
+      <p:regular r:id="rId20"/>
+      <p:bold r:id="rId21"/>
     </p:embeddedFont>
   </p:embeddedFontLst>
   <p:defaultTextStyle>
@@ -12277,7 +12278,7 @@
             <a:r>
               <a:rPr lang="en-US" altLang="en-US" dirty="0">
                 <a:solidFill>
-                  <a:schemeClr val="accent1"/>
+                  <a:schemeClr val="accent2"/>
                 </a:solidFill>
                 <a:latin typeface="Fira Code"/>
                 <a:ea typeface="Fira Code"/>
@@ -12287,7 +12288,7 @@
             </a:r>
             <a:endParaRPr lang="fa-IR" altLang="en-US" dirty="0">
               <a:solidFill>
-                <a:schemeClr val="accent1"/>
+                <a:schemeClr val="accent2"/>
               </a:solidFill>
               <a:latin typeface="Fira Code"/>
               <a:ea typeface="Fira Code"/>
@@ -12324,7 +12325,7 @@
             <a:r>
               <a:rPr lang="en-US" altLang="en-US" dirty="0">
                 <a:solidFill>
-                  <a:schemeClr val="accent1"/>
+                  <a:schemeClr val="accent2"/>
                 </a:solidFill>
                 <a:latin typeface="Fira Code"/>
                 <a:ea typeface="Fira Code"/>
@@ -12335,7 +12336,7 @@
             <a:r>
               <a:rPr lang="en-US" altLang="en-US" b="1" dirty="0">
                 <a:solidFill>
-                  <a:schemeClr val="accent1"/>
+                  <a:schemeClr val="accent2"/>
                 </a:solidFill>
                 <a:latin typeface="Fira Code"/>
                 <a:ea typeface="Fira Code"/>
@@ -12346,7 +12347,7 @@
             <a:r>
               <a:rPr lang="en-US" altLang="en-US" dirty="0">
                 <a:solidFill>
-                  <a:schemeClr val="accent1"/>
+                  <a:schemeClr val="accent2"/>
                 </a:solidFill>
                 <a:latin typeface="Fira Code"/>
                 <a:ea typeface="Fira Code"/>
@@ -12357,7 +12358,7 @@
             <a:br>
               <a:rPr lang="en-US" altLang="en-US" dirty="0">
                 <a:solidFill>
-                  <a:schemeClr val="accent1"/>
+                  <a:schemeClr val="accent2"/>
                 </a:solidFill>
                 <a:latin typeface="Fira Code"/>
                 <a:ea typeface="Fira Code"/>
@@ -12367,7 +12368,7 @@
             <a:r>
               <a:rPr lang="en-US" altLang="en-US" dirty="0">
                 <a:solidFill>
-                  <a:schemeClr val="accent1"/>
+                  <a:schemeClr val="accent2"/>
                 </a:solidFill>
                 <a:latin typeface="Fira Code"/>
                 <a:ea typeface="Fira Code"/>
@@ -12377,7 +12378,7 @@
             </a:r>
             <a:endParaRPr lang="fa-IR" altLang="en-US" dirty="0">
               <a:solidFill>
-                <a:schemeClr val="accent1"/>
+                <a:schemeClr val="accent2"/>
               </a:solidFill>
               <a:latin typeface="Fira Code"/>
               <a:ea typeface="Fira Code"/>
@@ -12556,7 +12557,7 @@
             <a:r>
               <a:rPr lang="en-US" altLang="en-US" dirty="0">
                 <a:solidFill>
-                  <a:schemeClr val="accent1"/>
+                  <a:schemeClr val="accent2"/>
                 </a:solidFill>
                 <a:latin typeface="Fira Code"/>
                 <a:ea typeface="Fira Code"/>
@@ -12585,7 +12586,7 @@
             <a:r>
               <a:rPr lang="en-US" altLang="en-US" dirty="0">
                 <a:solidFill>
-                  <a:schemeClr val="accent1"/>
+                  <a:schemeClr val="accent2"/>
                 </a:solidFill>
                 <a:latin typeface="Fira Code"/>
                 <a:ea typeface="Fira Code"/>
@@ -13249,6 +13250,854 @@
     <p:extLst>
       <p:ext uri="{BB962C8B-B14F-4D97-AF65-F5344CB8AC3E}">
         <p14:creationId xmlns:p14="http://schemas.microsoft.com/office/powerpoint/2010/main" val="2780904189"/>
+      </p:ext>
+    </p:extLst>
+  </p:cSld>
+  <p:clrMapOvr>
+    <a:masterClrMapping/>
+  </p:clrMapOvr>
+</p:sld>
+</file>
+
+<file path=ppt/slides/slide15.xml><?xml version="1.0" encoding="utf-8"?>
+<p:sld xmlns:a="http://schemas.openxmlformats.org/drawingml/2006/main" xmlns:r="http://schemas.openxmlformats.org/officeDocument/2006/relationships" xmlns:p="http://schemas.openxmlformats.org/presentationml/2006/main">
+  <p:cSld>
+    <p:spTree>
+      <p:nvGrpSpPr>
+        <p:cNvPr id="1" name="">
+          <a:extLst>
+            <a:ext uri="{FF2B5EF4-FFF2-40B4-BE49-F238E27FC236}">
+              <a16:creationId xmlns:a16="http://schemas.microsoft.com/office/drawing/2014/main" id="{73E96244-A6E0-B671-5A89-E09FE1C1A44E}"/>
+            </a:ext>
+          </a:extLst>
+        </p:cNvPr>
+        <p:cNvGrpSpPr/>
+        <p:nvPr/>
+      </p:nvGrpSpPr>
+      <p:grpSpPr>
+        <a:xfrm>
+          <a:off x="0" y="0"/>
+          <a:ext cx="0" cy="0"/>
+          <a:chOff x="0" y="0"/>
+          <a:chExt cx="0" cy="0"/>
+        </a:xfrm>
+      </p:grpSpPr>
+      <p:sp>
+        <p:nvSpPr>
+          <p:cNvPr id="2" name="Title 1">
+            <a:extLst>
+              <a:ext uri="{FF2B5EF4-FFF2-40B4-BE49-F238E27FC236}">
+                <a16:creationId xmlns:a16="http://schemas.microsoft.com/office/drawing/2014/main" id="{2C53F9B1-F672-DD39-3BBC-AE8DC655FE3E}"/>
+              </a:ext>
+            </a:extLst>
+          </p:cNvPr>
+          <p:cNvSpPr>
+            <a:spLocks noGrp="1"/>
+          </p:cNvSpPr>
+          <p:nvPr>
+            <p:ph type="title"/>
+          </p:nvPr>
+        </p:nvSpPr>
+        <p:spPr/>
+        <p:txBody>
+          <a:bodyPr/>
+          <a:lstStyle/>
+          <a:p>
+            <a:r>
+              <a:rPr lang="en-US" sz="2400" dirty="0">
+                <a:solidFill>
+                  <a:schemeClr val="accent2"/>
+                </a:solidFill>
+              </a:rPr>
+              <a:t>Homework</a:t>
+            </a:r>
+          </a:p>
+        </p:txBody>
+      </p:sp>
+      <p:sp>
+        <p:nvSpPr>
+          <p:cNvPr id="7" name="TextBox 6">
+            <a:extLst>
+              <a:ext uri="{FF2B5EF4-FFF2-40B4-BE49-F238E27FC236}">
+                <a16:creationId xmlns:a16="http://schemas.microsoft.com/office/drawing/2014/main" id="{584FB329-0C1F-E24C-C0B3-CDD3D6501066}"/>
+              </a:ext>
+            </a:extLst>
+          </p:cNvPr>
+          <p:cNvSpPr txBox="1"/>
+          <p:nvPr/>
+        </p:nvSpPr>
+        <p:spPr>
+          <a:xfrm>
+            <a:off x="6737063" y="158212"/>
+            <a:ext cx="506870" cy="307777"/>
+          </a:xfrm>
+          <a:prstGeom prst="rect">
+            <a:avLst/>
+          </a:prstGeom>
+          <a:noFill/>
+        </p:spPr>
+        <p:txBody>
+          <a:bodyPr wrap="none" rtlCol="0">
+            <a:spAutoFit/>
+          </a:bodyPr>
+          <a:lstStyle/>
+          <a:p>
+            <a:r>
+              <a:rPr lang="en-US" dirty="0">
+                <a:solidFill>
+                  <a:schemeClr val="accent3"/>
+                </a:solidFill>
+                <a:latin typeface="Fira Code"/>
+                <a:ea typeface="Fira Code"/>
+                <a:cs typeface="Fira Code"/>
+                <a:sym typeface="Fira Code"/>
+              </a:rPr>
+              <a:t>HW</a:t>
+            </a:r>
+            <a:r>
+              <a:rPr lang="fa-IR" dirty="0">
+                <a:solidFill>
+                  <a:schemeClr val="accent3"/>
+                </a:solidFill>
+                <a:latin typeface="Fira Code"/>
+                <a:ea typeface="Fira Code"/>
+                <a:cs typeface="Fira Code"/>
+                <a:sym typeface="Fira Code"/>
+              </a:rPr>
+              <a:t>2</a:t>
+            </a:r>
+            <a:endParaRPr lang="en-US" dirty="0">
+              <a:solidFill>
+                <a:schemeClr val="accent3"/>
+              </a:solidFill>
+              <a:latin typeface="Fira Code"/>
+              <a:ea typeface="Fira Code"/>
+              <a:cs typeface="Fira Code"/>
+              <a:sym typeface="Fira Code"/>
+            </a:endParaRPr>
+          </a:p>
+        </p:txBody>
+      </p:sp>
+      <p:sp>
+        <p:nvSpPr>
+          <p:cNvPr id="3" name="Google Shape;473;p28">
+            <a:extLst>
+              <a:ext uri="{FF2B5EF4-FFF2-40B4-BE49-F238E27FC236}">
+                <a16:creationId xmlns:a16="http://schemas.microsoft.com/office/drawing/2014/main" id="{D199699C-11C1-DF2C-967E-56E97482567A}"/>
+              </a:ext>
+            </a:extLst>
+          </p:cNvPr>
+          <p:cNvSpPr txBox="1">
+            <a:spLocks/>
+          </p:cNvSpPr>
+          <p:nvPr/>
+        </p:nvSpPr>
+        <p:spPr>
+          <a:xfrm>
+            <a:off x="710125" y="4694725"/>
+            <a:ext cx="4865100" cy="357300"/>
+          </a:xfrm>
+          <a:prstGeom prst="rect">
+            <a:avLst/>
+          </a:prstGeom>
+          <a:noFill/>
+          <a:ln>
+            <a:noFill/>
+          </a:ln>
+        </p:spPr>
+        <p:txBody>
+          <a:bodyPr spcFirstLastPara="1" wrap="square" lIns="91425" tIns="91425" rIns="91425" bIns="91425" anchor="ctr" anchorCtr="0">
+            <a:noAutofit/>
+          </a:bodyPr>
+          <a:lstStyle>
+            <a:defPPr marR="0" lvl="0" algn="l" rtl="0">
+              <a:lnSpc>
+                <a:spcPct val="100000"/>
+              </a:lnSpc>
+              <a:spcBef>
+                <a:spcPts val="0"/>
+              </a:spcBef>
+              <a:spcAft>
+                <a:spcPts val="0"/>
+              </a:spcAft>
+            </a:defPPr>
+            <a:lvl1pPr marL="457200" marR="0" lvl="0" indent="-317500" algn="l" rtl="0">
+              <a:lnSpc>
+                <a:spcPct val="100000"/>
+              </a:lnSpc>
+              <a:spcBef>
+                <a:spcPts val="0"/>
+              </a:spcBef>
+              <a:spcAft>
+                <a:spcPts val="0"/>
+              </a:spcAft>
+              <a:buClr>
+                <a:schemeClr val="dk2"/>
+              </a:buClr>
+              <a:buSzPts val="1400"/>
+              <a:buFont typeface="Fira Code"/>
+              <a:buChar char="●"/>
+              <a:defRPr sz="1400" b="0" i="0" u="none" strike="noStrike" cap="none">
+                <a:solidFill>
+                  <a:schemeClr val="dk2"/>
+                </a:solidFill>
+                <a:latin typeface="Fira Code"/>
+                <a:ea typeface="Fira Code"/>
+                <a:cs typeface="Fira Code"/>
+                <a:sym typeface="Fira Code"/>
+              </a:defRPr>
+            </a:lvl1pPr>
+            <a:lvl2pPr marL="914400" marR="0" lvl="1" indent="-317500" algn="l" rtl="0">
+              <a:lnSpc>
+                <a:spcPct val="100000"/>
+              </a:lnSpc>
+              <a:spcBef>
+                <a:spcPts val="0"/>
+              </a:spcBef>
+              <a:spcAft>
+                <a:spcPts val="0"/>
+              </a:spcAft>
+              <a:buClr>
+                <a:schemeClr val="dk2"/>
+              </a:buClr>
+              <a:buSzPts val="1400"/>
+              <a:buFont typeface="Fira Code"/>
+              <a:buChar char="○"/>
+              <a:defRPr sz="1400" b="0" i="0" u="none" strike="noStrike" cap="none">
+                <a:solidFill>
+                  <a:schemeClr val="dk2"/>
+                </a:solidFill>
+                <a:latin typeface="Fira Code"/>
+                <a:ea typeface="Fira Code"/>
+                <a:cs typeface="Fira Code"/>
+                <a:sym typeface="Fira Code"/>
+              </a:defRPr>
+            </a:lvl2pPr>
+            <a:lvl3pPr marL="1371600" marR="0" lvl="2" indent="-317500" algn="l" rtl="0">
+              <a:lnSpc>
+                <a:spcPct val="100000"/>
+              </a:lnSpc>
+              <a:spcBef>
+                <a:spcPts val="0"/>
+              </a:spcBef>
+              <a:spcAft>
+                <a:spcPts val="0"/>
+              </a:spcAft>
+              <a:buClr>
+                <a:schemeClr val="dk2"/>
+              </a:buClr>
+              <a:buSzPts val="1400"/>
+              <a:buFont typeface="Fira Code"/>
+              <a:buChar char="■"/>
+              <a:defRPr sz="1400" b="0" i="0" u="none" strike="noStrike" cap="none">
+                <a:solidFill>
+                  <a:schemeClr val="dk2"/>
+                </a:solidFill>
+                <a:latin typeface="Fira Code"/>
+                <a:ea typeface="Fira Code"/>
+                <a:cs typeface="Fira Code"/>
+                <a:sym typeface="Fira Code"/>
+              </a:defRPr>
+            </a:lvl3pPr>
+            <a:lvl4pPr marL="1828800" marR="0" lvl="3" indent="-317500" algn="l" rtl="0">
+              <a:lnSpc>
+                <a:spcPct val="100000"/>
+              </a:lnSpc>
+              <a:spcBef>
+                <a:spcPts val="0"/>
+              </a:spcBef>
+              <a:spcAft>
+                <a:spcPts val="0"/>
+              </a:spcAft>
+              <a:buClr>
+                <a:schemeClr val="dk2"/>
+              </a:buClr>
+              <a:buSzPts val="1400"/>
+              <a:buFont typeface="Fira Code"/>
+              <a:buChar char="●"/>
+              <a:defRPr sz="1400" b="0" i="0" u="none" strike="noStrike" cap="none">
+                <a:solidFill>
+                  <a:schemeClr val="dk2"/>
+                </a:solidFill>
+                <a:latin typeface="Fira Code"/>
+                <a:ea typeface="Fira Code"/>
+                <a:cs typeface="Fira Code"/>
+                <a:sym typeface="Fira Code"/>
+              </a:defRPr>
+            </a:lvl4pPr>
+            <a:lvl5pPr marL="2286000" marR="0" lvl="4" indent="-317500" algn="l" rtl="0">
+              <a:lnSpc>
+                <a:spcPct val="100000"/>
+              </a:lnSpc>
+              <a:spcBef>
+                <a:spcPts val="0"/>
+              </a:spcBef>
+              <a:spcAft>
+                <a:spcPts val="0"/>
+              </a:spcAft>
+              <a:buClr>
+                <a:schemeClr val="dk2"/>
+              </a:buClr>
+              <a:buSzPts val="1400"/>
+              <a:buFont typeface="Fira Code"/>
+              <a:buChar char="○"/>
+              <a:defRPr sz="1400" b="0" i="0" u="none" strike="noStrike" cap="none">
+                <a:solidFill>
+                  <a:schemeClr val="dk2"/>
+                </a:solidFill>
+                <a:latin typeface="Fira Code"/>
+                <a:ea typeface="Fira Code"/>
+                <a:cs typeface="Fira Code"/>
+                <a:sym typeface="Fira Code"/>
+              </a:defRPr>
+            </a:lvl5pPr>
+            <a:lvl6pPr marL="2743200" marR="0" lvl="5" indent="-317500" algn="l" rtl="0">
+              <a:lnSpc>
+                <a:spcPct val="100000"/>
+              </a:lnSpc>
+              <a:spcBef>
+                <a:spcPts val="0"/>
+              </a:spcBef>
+              <a:spcAft>
+                <a:spcPts val="0"/>
+              </a:spcAft>
+              <a:buClr>
+                <a:schemeClr val="dk2"/>
+              </a:buClr>
+              <a:buSzPts val="1400"/>
+              <a:buFont typeface="Fira Code"/>
+              <a:buChar char="■"/>
+              <a:defRPr sz="1400" b="0" i="0" u="none" strike="noStrike" cap="none">
+                <a:solidFill>
+                  <a:schemeClr val="dk2"/>
+                </a:solidFill>
+                <a:latin typeface="Fira Code"/>
+                <a:ea typeface="Fira Code"/>
+                <a:cs typeface="Fira Code"/>
+                <a:sym typeface="Fira Code"/>
+              </a:defRPr>
+            </a:lvl6pPr>
+            <a:lvl7pPr marL="3200400" marR="0" lvl="6" indent="-317500" algn="l" rtl="0">
+              <a:lnSpc>
+                <a:spcPct val="100000"/>
+              </a:lnSpc>
+              <a:spcBef>
+                <a:spcPts val="0"/>
+              </a:spcBef>
+              <a:spcAft>
+                <a:spcPts val="0"/>
+              </a:spcAft>
+              <a:buClr>
+                <a:schemeClr val="dk2"/>
+              </a:buClr>
+              <a:buSzPts val="1400"/>
+              <a:buFont typeface="Fira Code"/>
+              <a:buChar char="●"/>
+              <a:defRPr sz="1400" b="0" i="0" u="none" strike="noStrike" cap="none">
+                <a:solidFill>
+                  <a:schemeClr val="dk2"/>
+                </a:solidFill>
+                <a:latin typeface="Fira Code"/>
+                <a:ea typeface="Fira Code"/>
+                <a:cs typeface="Fira Code"/>
+                <a:sym typeface="Fira Code"/>
+              </a:defRPr>
+            </a:lvl7pPr>
+            <a:lvl8pPr marL="3657600" marR="0" lvl="7" indent="-317500" algn="l" rtl="0">
+              <a:lnSpc>
+                <a:spcPct val="100000"/>
+              </a:lnSpc>
+              <a:spcBef>
+                <a:spcPts val="0"/>
+              </a:spcBef>
+              <a:spcAft>
+                <a:spcPts val="0"/>
+              </a:spcAft>
+              <a:buClr>
+                <a:schemeClr val="dk2"/>
+              </a:buClr>
+              <a:buSzPts val="1400"/>
+              <a:buFont typeface="Fira Code"/>
+              <a:buChar char="○"/>
+              <a:defRPr sz="1400" b="0" i="0" u="none" strike="noStrike" cap="none">
+                <a:solidFill>
+                  <a:schemeClr val="dk2"/>
+                </a:solidFill>
+                <a:latin typeface="Fira Code"/>
+                <a:ea typeface="Fira Code"/>
+                <a:cs typeface="Fira Code"/>
+                <a:sym typeface="Fira Code"/>
+              </a:defRPr>
+            </a:lvl8pPr>
+            <a:lvl9pPr marL="4114800" marR="0" lvl="8" indent="-317500" algn="l" rtl="0">
+              <a:lnSpc>
+                <a:spcPct val="100000"/>
+              </a:lnSpc>
+              <a:spcBef>
+                <a:spcPts val="0"/>
+              </a:spcBef>
+              <a:spcAft>
+                <a:spcPts val="0"/>
+              </a:spcAft>
+              <a:buClr>
+                <a:schemeClr val="dk2"/>
+              </a:buClr>
+              <a:buSzPts val="1400"/>
+              <a:buFont typeface="Fira Code"/>
+              <a:buChar char="■"/>
+              <a:defRPr sz="1400" b="0" i="0" u="none" strike="noStrike" cap="none">
+                <a:solidFill>
+                  <a:schemeClr val="dk2"/>
+                </a:solidFill>
+                <a:latin typeface="Fira Code"/>
+                <a:ea typeface="Fira Code"/>
+                <a:cs typeface="Fira Code"/>
+                <a:sym typeface="Fira Code"/>
+              </a:defRPr>
+            </a:lvl9pPr>
+          </a:lstStyle>
+          <a:p>
+            <a:pPr marL="0" indent="0">
+              <a:buFont typeface="Fira Code"/>
+              <a:buNone/>
+            </a:pPr>
+            <a:r>
+              <a:rPr lang="en-US">
+                <a:solidFill>
+                  <a:schemeClr val="accent3"/>
+                </a:solidFill>
+              </a:rPr>
+              <a:t>Programming Language Lab</a:t>
+            </a:r>
+            <a:endParaRPr lang="en-US" dirty="0">
+              <a:solidFill>
+                <a:schemeClr val="accent3"/>
+              </a:solidFill>
+            </a:endParaRPr>
+          </a:p>
+        </p:txBody>
+      </p:sp>
+      <p:sp>
+        <p:nvSpPr>
+          <p:cNvPr id="4" name="Google Shape;473;p28">
+            <a:extLst>
+              <a:ext uri="{FF2B5EF4-FFF2-40B4-BE49-F238E27FC236}">
+                <a16:creationId xmlns:a16="http://schemas.microsoft.com/office/drawing/2014/main" id="{DA0A3688-8EE5-555E-F2F0-0BF727491AE7}"/>
+              </a:ext>
+            </a:extLst>
+          </p:cNvPr>
+          <p:cNvSpPr txBox="1">
+            <a:spLocks/>
+          </p:cNvSpPr>
+          <p:nvPr/>
+        </p:nvSpPr>
+        <p:spPr>
+          <a:xfrm>
+            <a:off x="8433851" y="4694675"/>
+            <a:ext cx="373886" cy="357300"/>
+          </a:xfrm>
+          <a:prstGeom prst="rect">
+            <a:avLst/>
+          </a:prstGeom>
+          <a:noFill/>
+          <a:ln>
+            <a:noFill/>
+          </a:ln>
+        </p:spPr>
+        <p:txBody>
+          <a:bodyPr spcFirstLastPara="1" wrap="square" lIns="91425" tIns="91425" rIns="91425" bIns="91425" anchor="ctr" anchorCtr="0">
+            <a:noAutofit/>
+          </a:bodyPr>
+          <a:lstStyle>
+            <a:defPPr marR="0" lvl="0" algn="l" rtl="0">
+              <a:lnSpc>
+                <a:spcPct val="100000"/>
+              </a:lnSpc>
+              <a:spcBef>
+                <a:spcPts val="0"/>
+              </a:spcBef>
+              <a:spcAft>
+                <a:spcPts val="0"/>
+              </a:spcAft>
+            </a:defPPr>
+            <a:lvl1pPr marL="457200" marR="0" lvl="0" indent="-317500" algn="l" rtl="0">
+              <a:lnSpc>
+                <a:spcPct val="100000"/>
+              </a:lnSpc>
+              <a:spcBef>
+                <a:spcPts val="0"/>
+              </a:spcBef>
+              <a:spcAft>
+                <a:spcPts val="0"/>
+              </a:spcAft>
+              <a:buClr>
+                <a:schemeClr val="dk2"/>
+              </a:buClr>
+              <a:buSzPts val="1400"/>
+              <a:buFont typeface="Fira Code"/>
+              <a:buChar char="●"/>
+              <a:defRPr sz="1400" b="0" i="0" u="none" strike="noStrike" cap="none">
+                <a:solidFill>
+                  <a:schemeClr val="dk2"/>
+                </a:solidFill>
+                <a:latin typeface="Fira Code"/>
+                <a:ea typeface="Fira Code"/>
+                <a:cs typeface="Fira Code"/>
+                <a:sym typeface="Fira Code"/>
+              </a:defRPr>
+            </a:lvl1pPr>
+            <a:lvl2pPr marL="914400" marR="0" lvl="1" indent="-317500" algn="l" rtl="0">
+              <a:lnSpc>
+                <a:spcPct val="100000"/>
+              </a:lnSpc>
+              <a:spcBef>
+                <a:spcPts val="0"/>
+              </a:spcBef>
+              <a:spcAft>
+                <a:spcPts val="0"/>
+              </a:spcAft>
+              <a:buClr>
+                <a:schemeClr val="dk2"/>
+              </a:buClr>
+              <a:buSzPts val="1400"/>
+              <a:buFont typeface="Fira Code"/>
+              <a:buChar char="○"/>
+              <a:defRPr sz="1400" b="0" i="0" u="none" strike="noStrike" cap="none">
+                <a:solidFill>
+                  <a:schemeClr val="dk2"/>
+                </a:solidFill>
+                <a:latin typeface="Fira Code"/>
+                <a:ea typeface="Fira Code"/>
+                <a:cs typeface="Fira Code"/>
+                <a:sym typeface="Fira Code"/>
+              </a:defRPr>
+            </a:lvl2pPr>
+            <a:lvl3pPr marL="1371600" marR="0" lvl="2" indent="-317500" algn="l" rtl="0">
+              <a:lnSpc>
+                <a:spcPct val="100000"/>
+              </a:lnSpc>
+              <a:spcBef>
+                <a:spcPts val="0"/>
+              </a:spcBef>
+              <a:spcAft>
+                <a:spcPts val="0"/>
+              </a:spcAft>
+              <a:buClr>
+                <a:schemeClr val="dk2"/>
+              </a:buClr>
+              <a:buSzPts val="1400"/>
+              <a:buFont typeface="Fira Code"/>
+              <a:buChar char="■"/>
+              <a:defRPr sz="1400" b="0" i="0" u="none" strike="noStrike" cap="none">
+                <a:solidFill>
+                  <a:schemeClr val="dk2"/>
+                </a:solidFill>
+                <a:latin typeface="Fira Code"/>
+                <a:ea typeface="Fira Code"/>
+                <a:cs typeface="Fira Code"/>
+                <a:sym typeface="Fira Code"/>
+              </a:defRPr>
+            </a:lvl3pPr>
+            <a:lvl4pPr marL="1828800" marR="0" lvl="3" indent="-317500" algn="l" rtl="0">
+              <a:lnSpc>
+                <a:spcPct val="100000"/>
+              </a:lnSpc>
+              <a:spcBef>
+                <a:spcPts val="0"/>
+              </a:spcBef>
+              <a:spcAft>
+                <a:spcPts val="0"/>
+              </a:spcAft>
+              <a:buClr>
+                <a:schemeClr val="dk2"/>
+              </a:buClr>
+              <a:buSzPts val="1400"/>
+              <a:buFont typeface="Fira Code"/>
+              <a:buChar char="●"/>
+              <a:defRPr sz="1400" b="0" i="0" u="none" strike="noStrike" cap="none">
+                <a:solidFill>
+                  <a:schemeClr val="dk2"/>
+                </a:solidFill>
+                <a:latin typeface="Fira Code"/>
+                <a:ea typeface="Fira Code"/>
+                <a:cs typeface="Fira Code"/>
+                <a:sym typeface="Fira Code"/>
+              </a:defRPr>
+            </a:lvl4pPr>
+            <a:lvl5pPr marL="2286000" marR="0" lvl="4" indent="-317500" algn="l" rtl="0">
+              <a:lnSpc>
+                <a:spcPct val="100000"/>
+              </a:lnSpc>
+              <a:spcBef>
+                <a:spcPts val="0"/>
+              </a:spcBef>
+              <a:spcAft>
+                <a:spcPts val="0"/>
+              </a:spcAft>
+              <a:buClr>
+                <a:schemeClr val="dk2"/>
+              </a:buClr>
+              <a:buSzPts val="1400"/>
+              <a:buFont typeface="Fira Code"/>
+              <a:buChar char="○"/>
+              <a:defRPr sz="1400" b="0" i="0" u="none" strike="noStrike" cap="none">
+                <a:solidFill>
+                  <a:schemeClr val="dk2"/>
+                </a:solidFill>
+                <a:latin typeface="Fira Code"/>
+                <a:ea typeface="Fira Code"/>
+                <a:cs typeface="Fira Code"/>
+                <a:sym typeface="Fira Code"/>
+              </a:defRPr>
+            </a:lvl5pPr>
+            <a:lvl6pPr marL="2743200" marR="0" lvl="5" indent="-317500" algn="l" rtl="0">
+              <a:lnSpc>
+                <a:spcPct val="100000"/>
+              </a:lnSpc>
+              <a:spcBef>
+                <a:spcPts val="0"/>
+              </a:spcBef>
+              <a:spcAft>
+                <a:spcPts val="0"/>
+              </a:spcAft>
+              <a:buClr>
+                <a:schemeClr val="dk2"/>
+              </a:buClr>
+              <a:buSzPts val="1400"/>
+              <a:buFont typeface="Fira Code"/>
+              <a:buChar char="■"/>
+              <a:defRPr sz="1400" b="0" i="0" u="none" strike="noStrike" cap="none">
+                <a:solidFill>
+                  <a:schemeClr val="dk2"/>
+                </a:solidFill>
+                <a:latin typeface="Fira Code"/>
+                <a:ea typeface="Fira Code"/>
+                <a:cs typeface="Fira Code"/>
+                <a:sym typeface="Fira Code"/>
+              </a:defRPr>
+            </a:lvl6pPr>
+            <a:lvl7pPr marL="3200400" marR="0" lvl="6" indent="-317500" algn="l" rtl="0">
+              <a:lnSpc>
+                <a:spcPct val="100000"/>
+              </a:lnSpc>
+              <a:spcBef>
+                <a:spcPts val="0"/>
+              </a:spcBef>
+              <a:spcAft>
+                <a:spcPts val="0"/>
+              </a:spcAft>
+              <a:buClr>
+                <a:schemeClr val="dk2"/>
+              </a:buClr>
+              <a:buSzPts val="1400"/>
+              <a:buFont typeface="Fira Code"/>
+              <a:buChar char="●"/>
+              <a:defRPr sz="1400" b="0" i="0" u="none" strike="noStrike" cap="none">
+                <a:solidFill>
+                  <a:schemeClr val="dk2"/>
+                </a:solidFill>
+                <a:latin typeface="Fira Code"/>
+                <a:ea typeface="Fira Code"/>
+                <a:cs typeface="Fira Code"/>
+                <a:sym typeface="Fira Code"/>
+              </a:defRPr>
+            </a:lvl7pPr>
+            <a:lvl8pPr marL="3657600" marR="0" lvl="7" indent="-317500" algn="l" rtl="0">
+              <a:lnSpc>
+                <a:spcPct val="100000"/>
+              </a:lnSpc>
+              <a:spcBef>
+                <a:spcPts val="0"/>
+              </a:spcBef>
+              <a:spcAft>
+                <a:spcPts val="0"/>
+              </a:spcAft>
+              <a:buClr>
+                <a:schemeClr val="dk2"/>
+              </a:buClr>
+              <a:buSzPts val="1400"/>
+              <a:buFont typeface="Fira Code"/>
+              <a:buChar char="○"/>
+              <a:defRPr sz="1400" b="0" i="0" u="none" strike="noStrike" cap="none">
+                <a:solidFill>
+                  <a:schemeClr val="dk2"/>
+                </a:solidFill>
+                <a:latin typeface="Fira Code"/>
+                <a:ea typeface="Fira Code"/>
+                <a:cs typeface="Fira Code"/>
+                <a:sym typeface="Fira Code"/>
+              </a:defRPr>
+            </a:lvl8pPr>
+            <a:lvl9pPr marL="4114800" marR="0" lvl="8" indent="-317500" algn="l" rtl="0">
+              <a:lnSpc>
+                <a:spcPct val="100000"/>
+              </a:lnSpc>
+              <a:spcBef>
+                <a:spcPts val="0"/>
+              </a:spcBef>
+              <a:spcAft>
+                <a:spcPts val="0"/>
+              </a:spcAft>
+              <a:buClr>
+                <a:schemeClr val="dk2"/>
+              </a:buClr>
+              <a:buSzPts val="1400"/>
+              <a:buFont typeface="Fira Code"/>
+              <a:buChar char="■"/>
+              <a:defRPr sz="1400" b="0" i="0" u="none" strike="noStrike" cap="none">
+                <a:solidFill>
+                  <a:schemeClr val="dk2"/>
+                </a:solidFill>
+                <a:latin typeface="Fira Code"/>
+                <a:ea typeface="Fira Code"/>
+                <a:cs typeface="Fira Code"/>
+                <a:sym typeface="Fira Code"/>
+              </a:defRPr>
+            </a:lvl9pPr>
+          </a:lstStyle>
+          <a:p>
+            <a:pPr marL="0" indent="0">
+              <a:buFont typeface="Fira Code"/>
+              <a:buNone/>
+            </a:pPr>
+            <a:r>
+              <a:rPr lang="fa-IR" sz="1100" dirty="0">
+                <a:solidFill>
+                  <a:schemeClr val="accent3"/>
+                </a:solidFill>
+              </a:rPr>
+              <a:t>13</a:t>
+            </a:r>
+            <a:endParaRPr lang="en" dirty="0">
+              <a:solidFill>
+                <a:schemeClr val="accent3"/>
+              </a:solidFill>
+            </a:endParaRPr>
+          </a:p>
+        </p:txBody>
+      </p:sp>
+      <p:sp>
+        <p:nvSpPr>
+          <p:cNvPr id="8" name="TextBox 7">
+            <a:extLst>
+              <a:ext uri="{FF2B5EF4-FFF2-40B4-BE49-F238E27FC236}">
+                <a16:creationId xmlns:a16="http://schemas.microsoft.com/office/drawing/2014/main" id="{F2C91BFF-910E-651B-47E1-A8DDE56E95AF}"/>
+              </a:ext>
+            </a:extLst>
+          </p:cNvPr>
+          <p:cNvSpPr txBox="1"/>
+          <p:nvPr/>
+        </p:nvSpPr>
+        <p:spPr>
+          <a:xfrm>
+            <a:off x="1330036" y="1240611"/>
+            <a:ext cx="7010400" cy="1384995"/>
+          </a:xfrm>
+          <a:prstGeom prst="rect">
+            <a:avLst/>
+          </a:prstGeom>
+          <a:noFill/>
+        </p:spPr>
+        <p:txBody>
+          <a:bodyPr wrap="square">
+            <a:spAutoFit/>
+          </a:bodyPr>
+          <a:lstStyle/>
+          <a:p>
+            <a:r>
+              <a:rPr lang="en-US" sz="1400" dirty="0">
+                <a:solidFill>
+                  <a:schemeClr val="accent3"/>
+                </a:solidFill>
+                <a:latin typeface="Fira Code"/>
+                <a:ea typeface="Fira Code"/>
+                <a:cs typeface="B Nazanin" panose="00000400000000000000" pitchFamily="2" charset="-78"/>
+              </a:rPr>
+              <a:t>Assignment</a:t>
+            </a:r>
+            <a:r>
+              <a:rPr lang="en-US" dirty="0">
+                <a:solidFill>
+                  <a:schemeClr val="accent3"/>
+                </a:solidFill>
+                <a:latin typeface="Fira Code"/>
+                <a:ea typeface="Fira Code"/>
+                <a:cs typeface="B Nazanin" panose="00000400000000000000" pitchFamily="2" charset="-78"/>
+              </a:rPr>
+              <a:t> - do the following:</a:t>
+            </a:r>
+            <a:endParaRPr lang="fa-IR" sz="1400" dirty="0">
+              <a:solidFill>
+                <a:schemeClr val="accent3"/>
+              </a:solidFill>
+              <a:latin typeface="Fira Code"/>
+              <a:ea typeface="Fira Code"/>
+              <a:cs typeface="B Nazanin" panose="00000400000000000000" pitchFamily="2" charset="-78"/>
+            </a:endParaRPr>
+          </a:p>
+          <a:p>
+            <a:endParaRPr lang="fa-IR" dirty="0">
+              <a:solidFill>
+                <a:schemeClr val="accent3"/>
+              </a:solidFill>
+              <a:latin typeface="Fira Code"/>
+              <a:ea typeface="Fira Code"/>
+              <a:cs typeface="B Nazanin" panose="00000400000000000000" pitchFamily="2" charset="-78"/>
+            </a:endParaRPr>
+          </a:p>
+          <a:p>
+            <a:r>
+              <a:rPr lang="en-US" sz="1400" dirty="0">
+                <a:solidFill>
+                  <a:schemeClr val="accent3"/>
+                </a:solidFill>
+                <a:latin typeface="Fira Code"/>
+                <a:ea typeface="Fira Code"/>
+                <a:cs typeface="B Nazanin" panose="00000400000000000000" pitchFamily="2" charset="-78"/>
+              </a:rPr>
+              <a:t>4.25 </a:t>
+            </a:r>
+            <a:r>
+              <a:rPr lang="en-US" sz="1400" dirty="0">
+                <a:solidFill>
+                  <a:schemeClr val="accent2"/>
+                </a:solidFill>
+                <a:latin typeface="Fira Code"/>
+                <a:ea typeface="Fira Code"/>
+                <a:cs typeface="B Nazanin" panose="00000400000000000000" pitchFamily="2" charset="-78"/>
+              </a:rPr>
+              <a:t>(Table of Decimal, Binary, Octal and Hexadecimal Equivalents)</a:t>
+            </a:r>
+          </a:p>
+          <a:p>
+            <a:br>
+              <a:rPr lang="en-US" sz="1400" dirty="0">
+                <a:solidFill>
+                  <a:schemeClr val="accent2"/>
+                </a:solidFill>
+                <a:latin typeface="Fira Code"/>
+                <a:ea typeface="Fira Code"/>
+                <a:cs typeface="B Nazanin" panose="00000400000000000000" pitchFamily="2" charset="-78"/>
+              </a:rPr>
+            </a:br>
+            <a:r>
+              <a:rPr lang="en-US" sz="1400" dirty="0">
+                <a:solidFill>
+                  <a:schemeClr val="accent3"/>
+                </a:solidFill>
+                <a:latin typeface="Fira Code"/>
+                <a:ea typeface="Fira Code"/>
+                <a:cs typeface="B Nazanin" panose="00000400000000000000" pitchFamily="2" charset="-78"/>
+              </a:rPr>
+              <a:t>Source: C How to Program, 9th Edition (Deitel)</a:t>
+            </a:r>
+          </a:p>
+        </p:txBody>
+      </p:sp>
+    </p:spTree>
+    <p:extLst>
+      <p:ext uri="{BB962C8B-B14F-4D97-AF65-F5344CB8AC3E}">
+        <p14:creationId xmlns:p14="http://schemas.microsoft.com/office/powerpoint/2010/main" val="2573768982"/>
       </p:ext>
     </p:extLst>
   </p:cSld>
